--- a/lectures/14/Microcontroller Programming.pptx
+++ b/lectures/14/Microcontroller Programming.pptx
@@ -244,7 +244,7 @@
           <a:p>
             <a:fld id="{6940DF67-43DD-4C69-A81D-1BCF90B7192E}" type="datetimeFigureOut">
               <a:rPr lang="en-US" smtClean="0"/>
-              <a:t>5/19/2026</a:t>
+              <a:t>5/26/2026</a:t>
             </a:fld>
             <a:endParaRPr lang="en-US"/>
           </a:p>
@@ -25058,11 +25058,11 @@
             </a:r>
             <a:r>
               <a:rPr lang="en-US" dirty="0"/>
-              <a:t> interrupt-</a:t>
-            </a:r>
-            <a:r>
-              <a:rPr lang="en-US" dirty="0" err="1"/>
-              <a:t>события</a:t>
+              <a:t> </a:t>
+            </a:r>
+            <a:r>
+              <a:rPr lang="ru-RU" dirty="0"/>
+              <a:t>прерывания</a:t>
             </a:r>
             <a:r>
               <a:rPr lang="en-US" dirty="0"/>
@@ -25695,7 +25695,15 @@
             </a:r>
             <a:r>
               <a:rPr lang="en-US" dirty="0"/>
-              <a:t> interrupts.</a:t>
+              <a:t> </a:t>
+            </a:r>
+            <a:r>
+              <a:rPr lang="ru-RU" dirty="0"/>
+              <a:t>прерываний</a:t>
+            </a:r>
+            <a:r>
+              <a:rPr lang="en-US" dirty="0"/>
+              <a:t>.</a:t>
             </a:r>
           </a:p>
           <a:p>
@@ -25776,6 +25784,10 @@
             </a:r>
           </a:p>
           <a:p>
+            <a:pPr marL="171450" indent="-171450">
+              <a:buFont typeface="Arial" panose="020B0604020202020204" pitchFamily="34" charset="0"/>
+              <a:buChar char="•"/>
+            </a:pPr>
             <a:r>
               <a:rPr lang="en-US" dirty="0" err="1"/>
               <a:t>сохранить</a:t>
@@ -25802,6 +25814,10 @@
             </a:r>
           </a:p>
           <a:p>
+            <a:pPr marL="171450" indent="-171450">
+              <a:buFont typeface="Arial" panose="020B0604020202020204" pitchFamily="34" charset="0"/>
+              <a:buChar char="•"/>
+            </a:pPr>
             <a:r>
               <a:rPr lang="en-US" dirty="0" err="1"/>
               <a:t>корректно</a:t>
@@ -25836,6 +25852,10 @@
             </a:r>
           </a:p>
           <a:p>
+            <a:pPr marL="171450" indent="-171450">
+              <a:buFont typeface="Arial" panose="020B0604020202020204" pitchFamily="34" charset="0"/>
+              <a:buChar char="•"/>
+            </a:pPr>
             <a:r>
               <a:rPr lang="en-US" dirty="0" err="1"/>
               <a:t>обеспечить</a:t>
@@ -26487,47 +26507,19 @@
             </a:r>
             <a:r>
               <a:rPr lang="en-US" dirty="0"/>
-              <a:t> с interrupts </a:t>
-            </a:r>
-            <a:r>
-              <a:rPr lang="en-US" dirty="0" err="1"/>
-              <a:t>особенно</a:t>
-            </a:r>
-            <a:r>
-              <a:rPr lang="en-US" dirty="0"/>
-              <a:t> </a:t>
-            </a:r>
-            <a:r>
-              <a:rPr lang="en-US" dirty="0" err="1"/>
-              <a:t>важным</a:t>
-            </a:r>
-            <a:r>
-              <a:rPr lang="en-US" dirty="0"/>
-              <a:t> </a:t>
-            </a:r>
-            <a:r>
-              <a:rPr lang="en-US" dirty="0" err="1"/>
-              <a:t>становится</a:t>
-            </a:r>
-            <a:r>
-              <a:rPr lang="en-US" dirty="0"/>
-              <a:t> </a:t>
-            </a:r>
-            <a:r>
-              <a:rPr lang="en-US" dirty="0" err="1"/>
-              <a:t>использование</a:t>
-            </a:r>
-            <a:r>
-              <a:rPr lang="en-US" dirty="0"/>
-              <a:t> </a:t>
-            </a:r>
-            <a:r>
-              <a:rPr lang="en-US" dirty="0" err="1"/>
-              <a:t>квалификатора</a:t>
-            </a:r>
-            <a:r>
-              <a:rPr lang="en-US" dirty="0"/>
-              <a:t> </a:t>
+              <a:t> с </a:t>
+            </a:r>
+            <a:r>
+              <a:rPr lang="ru-RU" dirty="0"/>
+              <a:t>прерываниями</a:t>
+            </a:r>
+            <a:r>
+              <a:rPr lang="en-US" dirty="0"/>
+              <a:t> </a:t>
+            </a:r>
+            <a:r>
+              <a:rPr lang="ru-RU" dirty="0"/>
+              <a:t>важно использовать </a:t>
             </a:r>
             <a:r>
               <a:rPr lang="en-US" sz="1200" kern="1200" dirty="0">
@@ -26544,6 +26536,10 @@
               <a:rPr lang="en-US" dirty="0"/>
               <a:t>.</a:t>
             </a:r>
+            <a:endParaRPr lang="ru-RU" dirty="0"/>
+          </a:p>
+          <a:p>
+            <a:endParaRPr lang="en-US" dirty="0"/>
           </a:p>
           <a:p>
             <a:r>
@@ -33717,7 +33713,7 @@
           <a:p>
             <a:fld id="{1D600B82-0A15-446D-88EA-592A7911FFA6}" type="datetimeFigureOut">
               <a:rPr lang="en-US" smtClean="0"/>
-              <a:t>5/19/2026</a:t>
+              <a:t>5/26/2026</a:t>
             </a:fld>
             <a:endParaRPr lang="en-US"/>
           </a:p>
@@ -33915,7 +33911,7 @@
           <a:p>
             <a:fld id="{1D600B82-0A15-446D-88EA-592A7911FFA6}" type="datetimeFigureOut">
               <a:rPr lang="en-US" smtClean="0"/>
-              <a:t>5/19/2026</a:t>
+              <a:t>5/26/2026</a:t>
             </a:fld>
             <a:endParaRPr lang="en-US"/>
           </a:p>
@@ -34123,7 +34119,7 @@
           <a:p>
             <a:fld id="{1D600B82-0A15-446D-88EA-592A7911FFA6}" type="datetimeFigureOut">
               <a:rPr lang="en-US" smtClean="0"/>
-              <a:t>5/19/2026</a:t>
+              <a:t>5/26/2026</a:t>
             </a:fld>
             <a:endParaRPr lang="en-US"/>
           </a:p>
@@ -34321,7 +34317,7 @@
           <a:p>
             <a:fld id="{1D600B82-0A15-446D-88EA-592A7911FFA6}" type="datetimeFigureOut">
               <a:rPr lang="en-US" smtClean="0"/>
-              <a:t>5/19/2026</a:t>
+              <a:t>5/26/2026</a:t>
             </a:fld>
             <a:endParaRPr lang="en-US"/>
           </a:p>
@@ -34596,7 +34592,7 @@
           <a:p>
             <a:fld id="{1D600B82-0A15-446D-88EA-592A7911FFA6}" type="datetimeFigureOut">
               <a:rPr lang="en-US" smtClean="0"/>
-              <a:t>5/19/2026</a:t>
+              <a:t>5/26/2026</a:t>
             </a:fld>
             <a:endParaRPr lang="en-US"/>
           </a:p>
@@ -34861,7 +34857,7 @@
           <a:p>
             <a:fld id="{1D600B82-0A15-446D-88EA-592A7911FFA6}" type="datetimeFigureOut">
               <a:rPr lang="en-US" smtClean="0"/>
-              <a:t>5/19/2026</a:t>
+              <a:t>5/26/2026</a:t>
             </a:fld>
             <a:endParaRPr lang="en-US"/>
           </a:p>
@@ -35273,7 +35269,7 @@
           <a:p>
             <a:fld id="{1D600B82-0A15-446D-88EA-592A7911FFA6}" type="datetimeFigureOut">
               <a:rPr lang="en-US" smtClean="0"/>
-              <a:t>5/19/2026</a:t>
+              <a:t>5/26/2026</a:t>
             </a:fld>
             <a:endParaRPr lang="en-US"/>
           </a:p>
@@ -35414,7 +35410,7 @@
           <a:p>
             <a:fld id="{1D600B82-0A15-446D-88EA-592A7911FFA6}" type="datetimeFigureOut">
               <a:rPr lang="en-US" smtClean="0"/>
-              <a:t>5/19/2026</a:t>
+              <a:t>5/26/2026</a:t>
             </a:fld>
             <a:endParaRPr lang="en-US"/>
           </a:p>
@@ -35527,7 +35523,7 @@
           <a:p>
             <a:fld id="{1D600B82-0A15-446D-88EA-592A7911FFA6}" type="datetimeFigureOut">
               <a:rPr lang="en-US" smtClean="0"/>
-              <a:t>5/19/2026</a:t>
+              <a:t>5/26/2026</a:t>
             </a:fld>
             <a:endParaRPr lang="en-US"/>
           </a:p>
@@ -35838,7 +35834,7 @@
           <a:p>
             <a:fld id="{1D600B82-0A15-446D-88EA-592A7911FFA6}" type="datetimeFigureOut">
               <a:rPr lang="en-US" smtClean="0"/>
-              <a:t>5/19/2026</a:t>
+              <a:t>5/26/2026</a:t>
             </a:fld>
             <a:endParaRPr lang="en-US"/>
           </a:p>
@@ -36126,7 +36122,7 @@
           <a:p>
             <a:fld id="{1D600B82-0A15-446D-88EA-592A7911FFA6}" type="datetimeFigureOut">
               <a:rPr lang="en-US" smtClean="0"/>
-              <a:t>5/19/2026</a:t>
+              <a:t>5/26/2026</a:t>
             </a:fld>
             <a:endParaRPr lang="en-US"/>
           </a:p>
@@ -36367,7 +36363,7 @@
           <a:p>
             <a:fld id="{1D600B82-0A15-446D-88EA-592A7911FFA6}" type="datetimeFigureOut">
               <a:rPr lang="en-US" smtClean="0"/>
-              <a:t>5/19/2026</a:t>
+              <a:t>5/26/2026</a:t>
             </a:fld>
             <a:endParaRPr lang="en-US"/>
           </a:p>
@@ -45098,7 +45094,7 @@
             <a:pPr lvl="1"/>
             <a:r>
               <a:rPr lang="en-US" dirty="0"/>
-              <a:t>PWM (Pulse Width Modulation, </a:t>
+              <a:t>PWM (Pulse Width Modulation), </a:t>
             </a:r>
             <a:r>
               <a:rPr lang="en-US" dirty="0" err="1"/>
@@ -45647,11 +45643,15 @@
           <a:lstStyle/>
           <a:p>
             <a:r>
-              <a:rPr lang="en-US" dirty="0"/>
-              <a:t>Interrupt —</a:t>
-            </a:r>
-            <a:r>
               <a:rPr lang="ru-RU" dirty="0"/>
+              <a:t>Прерывание </a:t>
+            </a:r>
+            <a:r>
+              <a:rPr lang="en-US" dirty="0"/>
+              <a:t>—</a:t>
+            </a:r>
+            <a:r>
+              <a:rPr lang="ru-RU" dirty="0"/>
               <a:t> </a:t>
             </a:r>
             <a:r>
@@ -45705,13 +45705,18 @@
           </a:p>
           <a:p>
             <a:r>
-              <a:rPr lang="en-US" b="1" dirty="0" err="1"/>
+              <a:rPr lang="en-US" dirty="0" err="1"/>
               <a:t>Источники</a:t>
             </a:r>
             <a:r>
-              <a:rPr lang="en-US" b="1" dirty="0"/>
-              <a:t> interrupts</a:t>
-            </a:r>
+              <a:rPr lang="en-US" dirty="0"/>
+              <a:t> </a:t>
+            </a:r>
+            <a:r>
+              <a:rPr lang="ru-RU" dirty="0"/>
+              <a:t>прерываний</a:t>
+            </a:r>
+            <a:endParaRPr lang="en-US" dirty="0"/>
           </a:p>
           <a:p>
             <a:pPr lvl="1"/>
@@ -45766,21 +45771,26 @@
           </a:p>
           <a:p>
             <a:r>
-              <a:rPr lang="en-US" b="1" dirty="0" err="1"/>
+              <a:rPr lang="en-US" dirty="0" err="1"/>
               <a:t>При</a:t>
             </a:r>
             <a:r>
-              <a:rPr lang="en-US" b="1" dirty="0"/>
-              <a:t> </a:t>
-            </a:r>
-            <a:r>
-              <a:rPr lang="en-US" b="1" dirty="0" err="1"/>
+              <a:rPr lang="en-US" dirty="0"/>
+              <a:t> </a:t>
+            </a:r>
+            <a:r>
+              <a:rPr lang="en-US" dirty="0" err="1"/>
               <a:t>возникновении</a:t>
             </a:r>
             <a:r>
-              <a:rPr lang="en-US" b="1" dirty="0"/>
-              <a:t> interrupt</a:t>
-            </a:r>
+              <a:rPr lang="en-US" dirty="0"/>
+              <a:t> </a:t>
+            </a:r>
+            <a:r>
+              <a:rPr lang="ru-RU" dirty="0"/>
+              <a:t>прерывания</a:t>
+            </a:r>
+            <a:endParaRPr lang="en-US" dirty="0"/>
           </a:p>
           <a:p>
             <a:pPr lvl="1"/>
